--- a/demo_site/files/slides/lecture10_hashtables.pptx
+++ b/demo_site/files/slides/lecture10_hashtables.pptx
@@ -5100,8 +5100,8 @@
           </a:p>
         </p:txBody>
       </p:sp>
-      <mc:AlternateContent xmlns:mc="http://schemas.openxmlformats.org/markup-compatibility/2006" xmlns:a14="http://schemas.microsoft.com/office/drawing/2010/main">
-        <mc:Choice Requires="a14">
+      <mc:AlternateContent xmlns:mc="http://schemas.openxmlformats.org/markup-compatibility/2006">
+        <mc:Choice xmlns:a14="http://schemas.microsoft.com/office/drawing/2010/main" Requires="a14">
           <p:sp>
             <p:nvSpPr>
               <p:cNvPr id="3" name="Content Placeholder 2">
@@ -5206,6 +5206,12 @@
                       </m:e>
                     </m:d>
                     <m:r>
+                      <a:rPr lang="en-US" b="0" i="1" smtClean="0">
+                        <a:latin typeface="Cambria Math" panose="02040503050406030204" pitchFamily="18" charset="0"/>
+                      </a:rPr>
+                      <m:t>%10</m:t>
+                    </m:r>
+                    <m:r>
                       <a:rPr lang="en-US" b="0" i="0" smtClean="0">
                         <a:latin typeface="Cambria Math" panose="02040503050406030204" pitchFamily="18" charset="0"/>
                       </a:rPr>
@@ -5221,7 +5227,7 @@
             </p:txBody>
           </p:sp>
         </mc:Choice>
-        <mc:Fallback xmlns="">
+        <mc:Fallback>
           <p:sp>
             <p:nvSpPr>
               <p:cNvPr id="3" name="Content Placeholder 2">
